--- a/Bus Stop Monitoring 3.pptx
+++ b/Bus Stop Monitoring 3.pptx
@@ -11,8 +11,9 @@
     <p:sldId id="263" r:id="rId8"/>
     <p:sldId id="267" r:id="rId9"/>
     <p:sldId id="268" r:id="rId10"/>
-    <p:sldId id="260" r:id="rId11"/>
-    <p:sldId id="271" r:id="rId12"/>
+    <p:sldId id="272" r:id="rId11"/>
+    <p:sldId id="260" r:id="rId12"/>
+    <p:sldId id="271" r:id="rId13"/>
   </p:sldIdLst>
   <p:sldSz cx="12192000" cy="6858000"/>
   <p:notesSz cx="6858000" cy="9144000"/>
@@ -125,7 +126,7 @@
     <p1510:client id="{24AA5CC6-A8A9-AE09-AB78-9CED373015B5}" v="10" dt="2024-02-15T19:29:17.307"/>
     <p1510:client id="{4D5C2510-E873-68BB-9F07-8D7BC92F78EC}" v="3973" dt="2024-02-15T19:24:04.478"/>
     <p1510:client id="{7AC454FC-9D8C-4070-96B4-FCB91C33AD2C}" v="1888" dt="2024-02-15T19:17:09.718"/>
-    <p1510:client id="{E2EC934B-73AE-B9A6-6E05-23AAEDBDDB05}" v="255" dt="2024-02-15T19:52:12.932"/>
+    <p1510:client id="{E2EC934B-73AE-B9A6-6E05-23AAEDBDDB05}" v="372" dt="2024-02-15T21:32:45.429"/>
     <p1510:client id="{FD26399B-E092-5286-C2D7-325C65A147FD}" v="166" dt="2024-02-15T16:45:16.845"/>
   </p1510:revLst>
 </p1510:revInfo>
@@ -3835,10 +3836,10 @@
           <a:lstStyle/>
           <a:p>
             <a:r>
-              <a:rPr lang="en-US" sz="1800" dirty="0"/>
+              <a:rPr lang="en-US" sz="1800"/>
               <a:t>Objectives:</a:t>
             </a:r>
-            <a:endParaRPr lang="en-US" sz="1800" dirty="0">
+            <a:endParaRPr lang="en-US" sz="1800">
               <a:cs typeface="Calibri Light"/>
             </a:endParaRPr>
           </a:p>
@@ -3873,7 +3874,7 @@
           <a:lstStyle/>
           <a:p>
             <a:r>
-              <a:rPr lang="en-US" sz="1800" dirty="0">
+              <a:rPr lang="en-US" sz="1800">
                 <a:solidFill>
                   <a:srgbClr val="0D0D0D"/>
                 </a:solidFill>
@@ -3883,7 +3884,7 @@
               </a:rPr>
               <a:t>Provide data-driven insights for effective decision-making.</a:t>
             </a:r>
-            <a:endParaRPr lang="en-US" sz="1800" dirty="0">
+            <a:endParaRPr lang="en-US" sz="1800">
               <a:solidFill>
                 <a:srgbClr val="000000"/>
               </a:solidFill>
@@ -3895,7 +3896,7 @@
           <a:p>
             <a:pPr marL="285750" indent="-285750"/>
             <a:r>
-              <a:rPr lang="en-US" sz="1800" dirty="0">
+              <a:rPr lang="en-US" sz="1800">
                 <a:solidFill>
                   <a:srgbClr val="0D0D0D"/>
                 </a:solidFill>
@@ -3905,7 +3906,7 @@
               </a:rPr>
               <a:t>Enhance overall safety and security at bus stations.</a:t>
             </a:r>
-            <a:endParaRPr lang="en-US" sz="1800" dirty="0">
+            <a:endParaRPr lang="en-US" sz="1800">
               <a:solidFill>
                 <a:srgbClr val="000000"/>
               </a:solidFill>
@@ -3920,7 +3921,7 @@
               <a:buChar char="•"/>
             </a:pPr>
             <a:r>
-              <a:rPr lang="en-US" sz="1800" dirty="0">
+              <a:rPr lang="en-US" sz="1800">
                 <a:solidFill>
                   <a:srgbClr val="0D0D0D"/>
                 </a:solidFill>
@@ -3930,7 +3931,7 @@
               </a:rPr>
               <a:t>Improve the reliability and efficiency of bus schedules.</a:t>
             </a:r>
-            <a:endParaRPr lang="en-US" sz="1800" dirty="0">
+            <a:endParaRPr lang="en-US" sz="1800">
               <a:solidFill>
                 <a:srgbClr val="000000"/>
               </a:solidFill>
@@ -3945,7 +3946,7 @@
               <a:buChar char="•"/>
             </a:pPr>
             <a:r>
-              <a:rPr lang="en-US" sz="1800" dirty="0">
+              <a:rPr lang="en-US" sz="1800">
                 <a:solidFill>
                   <a:srgbClr val="0D0D0D"/>
                 </a:solidFill>
@@ -3955,7 +3956,7 @@
               </a:rPr>
               <a:t>Offer passenger-centric services for a seamless transit experience.</a:t>
             </a:r>
-            <a:endParaRPr lang="en-US" dirty="0">
+            <a:endParaRPr lang="en-US">
               <a:latin typeface="Calibri Light"/>
               <a:ea typeface="Calibri" panose="020F0502020204030204"/>
               <a:cs typeface="Calibri" panose="020F0502020204030204"/>
@@ -3998,7 +3999,7 @@
           <a:lstStyle/>
           <a:p>
             <a:r>
-              <a:rPr lang="en-US" sz="2400" dirty="0">
+              <a:rPr lang="en-US" sz="2400">
                 <a:solidFill>
                   <a:schemeClr val="tx2">
                     <a:lumMod val="75000"/>
@@ -4044,7 +4045,7 @@
           <a:lstStyle/>
           <a:p>
             <a:r>
-              <a:rPr lang="en-US" sz="2000" dirty="0">
+              <a:rPr lang="en-US" sz="2000">
                 <a:solidFill>
                   <a:srgbClr val="0D0D0D"/>
                 </a:solidFill>
@@ -4053,7 +4054,7 @@
               <a:t>is an application designed </a:t>
             </a:r>
             <a:r>
-              <a:rPr lang="en-US" sz="2000" dirty="0">
+              <a:rPr lang="en-US" sz="2000">
                 <a:solidFill>
                   <a:srgbClr val="0D0D0D"/>
                 </a:solidFill>
@@ -4062,7 +4063,7 @@
               </a:rPr>
               <a:t>to efficiently track and manage city bus traffic systems, with a primary focus on meeting the passengers needs.</a:t>
             </a:r>
-            <a:endParaRPr lang="en-US" sz="2000" dirty="0">
+            <a:endParaRPr lang="en-US" sz="2000">
               <a:cs typeface="Calibri"/>
             </a:endParaRPr>
           </a:p>
@@ -9036,8 +9037,8 @@
           </a:fontRef>
         </p:style>
       </p:cxnSp>
-      <mc:AlternateContent xmlns:mc="http://schemas.openxmlformats.org/markup-compatibility/2006" xmlns:p14="http://schemas.microsoft.com/office/powerpoint/2010/main">
-        <mc:Choice Requires="p14">
+      <mc:AlternateContent xmlns:mc="http://schemas.openxmlformats.org/markup-compatibility/2006">
+        <mc:Choice xmlns:p14="http://schemas.microsoft.com/office/powerpoint/2010/main" Requires="p14">
           <p:contentPart p14:bwMode="auto" r:id="rId2">
             <p14:nvContentPartPr>
               <p14:cNvPr id="15" name="Ink 14">
@@ -9056,7 +9057,7 @@
             </p14:xfrm>
           </p:contentPart>
         </mc:Choice>
-        <mc:Fallback xmlns="">
+        <mc:Fallback>
           <p:pic>
             <p:nvPicPr>
               <p:cNvPr id="15" name="Ink 14">
@@ -9376,6 +9377,203 @@
 </file>
 
 <file path=ppt/slides/slide7.xml><?xml version="1.0" encoding="utf-8"?>
+<p:sld xmlns:a="http://schemas.openxmlformats.org/drawingml/2006/main" xmlns:r="http://schemas.openxmlformats.org/officeDocument/2006/relationships" xmlns:p="http://schemas.openxmlformats.org/presentationml/2006/main">
+  <p:cSld>
+    <p:bg>
+      <p:bgPr>
+        <a:solidFill>
+          <a:schemeClr val="bg1">
+            <a:lumMod val="85000"/>
+          </a:schemeClr>
+        </a:solidFill>
+        <a:effectLst/>
+      </p:bgPr>
+    </p:bg>
+    <p:spTree>
+      <p:nvGrpSpPr>
+        <p:cNvPr id="1" name=""/>
+        <p:cNvGrpSpPr/>
+        <p:nvPr/>
+      </p:nvGrpSpPr>
+      <p:grpSpPr>
+        <a:xfrm>
+          <a:off x="0" y="0"/>
+          <a:ext cx="0" cy="0"/>
+          <a:chOff x="0" y="0"/>
+          <a:chExt cx="0" cy="0"/>
+        </a:xfrm>
+      </p:grpSpPr>
+      <p:sp>
+        <p:nvSpPr>
+          <p:cNvPr id="2" name="Title 1">
+            <a:extLst>
+              <a:ext uri="{FF2B5EF4-FFF2-40B4-BE49-F238E27FC236}">
+                <a16:creationId xmlns:a16="http://schemas.microsoft.com/office/drawing/2014/main" id="{833698CF-8D48-316B-2957-8E49E1F983C4}"/>
+              </a:ext>
+            </a:extLst>
+          </p:cNvPr>
+          <p:cNvSpPr>
+            <a:spLocks noGrp="1"/>
+          </p:cNvSpPr>
+          <p:nvPr>
+            <p:ph type="title"/>
+          </p:nvPr>
+        </p:nvSpPr>
+        <p:spPr>
+          <a:xfrm>
+            <a:off x="457200" y="-4989"/>
+            <a:ext cx="10515600" cy="1325563"/>
+          </a:xfrm>
+        </p:spPr>
+        <p:txBody>
+          <a:bodyPr>
+            <a:normAutofit/>
+          </a:bodyPr>
+          <a:lstStyle/>
+          <a:p>
+            <a:r>
+              <a:rPr lang="en-US" sz="2800" dirty="0">
+                <a:latin typeface="Söhne"/>
+                <a:ea typeface="Calibri Light"/>
+                <a:cs typeface="Calibri Light"/>
+              </a:rPr>
+              <a:t>Front End pages</a:t>
+            </a:r>
+          </a:p>
+        </p:txBody>
+      </p:sp>
+      <p:pic>
+        <p:nvPicPr>
+          <p:cNvPr id="4" name="Picture 3" descr="A screenshot of a map&#10;&#10;Description automatically generated">
+            <a:extLst>
+              <a:ext uri="{FF2B5EF4-FFF2-40B4-BE49-F238E27FC236}">
+                <a16:creationId xmlns:a16="http://schemas.microsoft.com/office/drawing/2014/main" id="{2859A319-D0B2-025B-5602-60AFC91005DD}"/>
+              </a:ext>
+            </a:extLst>
+          </p:cNvPr>
+          <p:cNvPicPr>
+            <a:picLocks noChangeAspect="1"/>
+          </p:cNvPicPr>
+          <p:nvPr/>
+        </p:nvPicPr>
+        <p:blipFill>
+          <a:blip r:embed="rId2"/>
+          <a:stretch>
+            <a:fillRect/>
+          </a:stretch>
+        </p:blipFill>
+        <p:spPr>
+          <a:xfrm>
+            <a:off x="936173" y="1077685"/>
+            <a:ext cx="4648202" cy="2623459"/>
+          </a:xfrm>
+          <a:prstGeom prst="rect">
+            <a:avLst/>
+          </a:prstGeom>
+        </p:spPr>
+      </p:pic>
+      <p:pic>
+        <p:nvPicPr>
+          <p:cNvPr id="5" name="Picture 4" descr="A screenshot of a computer&#10;&#10;Description automatically generated">
+            <a:extLst>
+              <a:ext uri="{FF2B5EF4-FFF2-40B4-BE49-F238E27FC236}">
+                <a16:creationId xmlns:a16="http://schemas.microsoft.com/office/drawing/2014/main" id="{15FEB524-41A7-70C3-C30A-F998F899C087}"/>
+              </a:ext>
+            </a:extLst>
+          </p:cNvPr>
+          <p:cNvPicPr>
+            <a:picLocks noChangeAspect="1"/>
+          </p:cNvPicPr>
+          <p:nvPr/>
+        </p:nvPicPr>
+        <p:blipFill>
+          <a:blip r:embed="rId3"/>
+          <a:stretch>
+            <a:fillRect/>
+          </a:stretch>
+        </p:blipFill>
+        <p:spPr>
+          <a:xfrm>
+            <a:off x="933449" y="4054928"/>
+            <a:ext cx="4691744" cy="2623459"/>
+          </a:xfrm>
+          <a:prstGeom prst="rect">
+            <a:avLst/>
+          </a:prstGeom>
+        </p:spPr>
+      </p:pic>
+      <p:pic>
+        <p:nvPicPr>
+          <p:cNvPr id="6" name="Picture 5" descr="A screenshot of a computer&#10;&#10;Description automatically generated">
+            <a:extLst>
+              <a:ext uri="{FF2B5EF4-FFF2-40B4-BE49-F238E27FC236}">
+                <a16:creationId xmlns:a16="http://schemas.microsoft.com/office/drawing/2014/main" id="{4CC8B3F6-D7CE-500F-5E05-B8CA2C4638ED}"/>
+              </a:ext>
+            </a:extLst>
+          </p:cNvPr>
+          <p:cNvPicPr>
+            <a:picLocks noChangeAspect="1"/>
+          </p:cNvPicPr>
+          <p:nvPr/>
+        </p:nvPicPr>
+        <p:blipFill rotWithShape="1">
+          <a:blip r:embed="rId4"/>
+          <a:srcRect t="7937" r="3928" b="6349"/>
+          <a:stretch/>
+        </p:blipFill>
+        <p:spPr>
+          <a:xfrm>
+            <a:off x="6283778" y="1143000"/>
+            <a:ext cx="5127177" cy="2558145"/>
+          </a:xfrm>
+          <a:prstGeom prst="rect">
+            <a:avLst/>
+          </a:prstGeom>
+        </p:spPr>
+      </p:pic>
+      <p:pic>
+        <p:nvPicPr>
+          <p:cNvPr id="7" name="Picture 6" descr="A screenshot of a computer&#10;&#10;Description automatically generated">
+            <a:extLst>
+              <a:ext uri="{FF2B5EF4-FFF2-40B4-BE49-F238E27FC236}">
+                <a16:creationId xmlns:a16="http://schemas.microsoft.com/office/drawing/2014/main" id="{76C38D92-A45B-1DE1-A49E-B03BDDD48D4B}"/>
+              </a:ext>
+            </a:extLst>
+          </p:cNvPr>
+          <p:cNvPicPr>
+            <a:picLocks noChangeAspect="1"/>
+          </p:cNvPicPr>
+          <p:nvPr/>
+        </p:nvPicPr>
+        <p:blipFill rotWithShape="1">
+          <a:blip r:embed="rId5"/>
+          <a:srcRect t="7937" r="3393" b="6984"/>
+          <a:stretch/>
+        </p:blipFill>
+        <p:spPr>
+          <a:xfrm>
+            <a:off x="6359978" y="4057650"/>
+            <a:ext cx="5127176" cy="2558146"/>
+          </a:xfrm>
+          <a:prstGeom prst="rect">
+            <a:avLst/>
+          </a:prstGeom>
+        </p:spPr>
+      </p:pic>
+    </p:spTree>
+    <p:extLst>
+      <p:ext uri="{BB962C8B-B14F-4D97-AF65-F5344CB8AC3E}">
+        <p14:creationId xmlns:p14="http://schemas.microsoft.com/office/powerpoint/2010/main" val="2432865421"/>
+      </p:ext>
+    </p:extLst>
+  </p:cSld>
+  <p:clrMapOvr>
+    <a:masterClrMapping/>
+  </p:clrMapOvr>
+</p:sld>
+</file>
+
+<file path=ppt/slides/slide8.xml><?xml version="1.0" encoding="utf-8"?>
 <p:sld xmlns:a="http://schemas.openxmlformats.org/drawingml/2006/main" xmlns:r="http://schemas.openxmlformats.org/officeDocument/2006/relationships" xmlns:p="http://schemas.openxmlformats.org/presentationml/2006/main">
   <p:cSld>
     <p:bg>
@@ -9603,7 +9801,7 @@
 </p:sld>
 </file>
 
-<file path=ppt/slides/slide8.xml><?xml version="1.0" encoding="utf-8"?>
+<file path=ppt/slides/slide9.xml><?xml version="1.0" encoding="utf-8"?>
 <p:sld xmlns:a="http://schemas.openxmlformats.org/drawingml/2006/main" xmlns:r="http://schemas.openxmlformats.org/officeDocument/2006/relationships" xmlns:p="http://schemas.openxmlformats.org/presentationml/2006/main">
   <p:cSld>
     <p:bg>
@@ -9826,7 +10024,7 @@
           <a:p>
             <a:pPr algn="ctr"/>
             <a:r>
-              <a:rPr lang="en-US" sz="1600" b="1" dirty="0">
+              <a:rPr lang="en-US" sz="1600" b="1">
                 <a:solidFill>
                   <a:schemeClr val="bg1"/>
                 </a:solidFill>
@@ -9844,14 +10042,14 @@
           <a:p>
             <a:pPr algn="ctr"/>
             <a:r>
-              <a:rPr lang="en-US" sz="1600" b="1" dirty="0">
+              <a:rPr lang="en-US" sz="1600" b="1">
                 <a:solidFill>
                   <a:schemeClr val="bg1"/>
                 </a:solidFill>
               </a:rPr>
               <a:t>Edge Controller</a:t>
             </a:r>
-            <a:endParaRPr lang="en-US" sz="1600" b="1" dirty="0">
+            <a:endParaRPr lang="en-US" sz="1600" b="1">
               <a:solidFill>
                 <a:schemeClr val="bg1"/>
               </a:solidFill>
@@ -9865,10 +10063,10 @@
               <a:buChar char="•"/>
             </a:pPr>
             <a:r>
-              <a:rPr lang="en-US" sz="1100" dirty="0"/>
+              <a:rPr lang="en-US" sz="1100"/>
               <a:t>External database set-up (Mongo)</a:t>
             </a:r>
-            <a:endParaRPr lang="en-US" sz="1100" dirty="0">
+            <a:endParaRPr lang="en-US" sz="1100">
               <a:ea typeface="Calibri"/>
               <a:cs typeface="Calibri"/>
             </a:endParaRPr>
@@ -9879,10 +10077,10 @@
               <a:buChar char="•"/>
             </a:pPr>
             <a:r>
-              <a:rPr lang="en-US" sz="1100" dirty="0"/>
+              <a:rPr lang="en-US" sz="1100"/>
               <a:t>Methods receiving data from edge devices and crafting payloads</a:t>
             </a:r>
-            <a:endParaRPr lang="en-US" sz="1100" dirty="0">
+            <a:endParaRPr lang="en-US" sz="1100">
               <a:ea typeface="Calibri"/>
               <a:cs typeface="Calibri"/>
             </a:endParaRPr>
@@ -9893,10 +10091,10 @@
               <a:buChar char="•"/>
             </a:pPr>
             <a:r>
-              <a:rPr lang="en-US" sz="1100" dirty="0"/>
+              <a:rPr lang="en-US" sz="1100"/>
               <a:t>Methods extracting historical data from external database</a:t>
             </a:r>
-            <a:endParaRPr lang="en-US" sz="1100" dirty="0">
+            <a:endParaRPr lang="en-US" sz="1100">
               <a:ea typeface="Calibri"/>
               <a:cs typeface="Calibri"/>
             </a:endParaRPr>
@@ -9907,10 +10105,10 @@
               <a:buChar char="•"/>
             </a:pPr>
             <a:r>
-              <a:rPr lang="en-US" sz="1100" dirty="0"/>
+              <a:rPr lang="en-US" sz="1100"/>
               <a:t>Posting to Context Broker</a:t>
             </a:r>
-            <a:endParaRPr lang="en-US" sz="1100" dirty="0">
+            <a:endParaRPr lang="en-US" sz="1100">
               <a:ea typeface="Calibri"/>
               <a:cs typeface="Calibri"/>
             </a:endParaRPr>
@@ -9921,10 +10119,10 @@
               <a:buChar char="•"/>
             </a:pPr>
             <a:r>
-              <a:rPr lang="en-US" sz="1100" dirty="0"/>
+              <a:rPr lang="en-US" sz="1100"/>
               <a:t>Publishing to MQTT Broker</a:t>
             </a:r>
-            <a:endParaRPr lang="en-US" sz="1100" dirty="0">
+            <a:endParaRPr lang="en-US" sz="1100">
               <a:ea typeface="Calibri"/>
               <a:cs typeface="Calibri"/>
             </a:endParaRPr>
@@ -9935,10 +10133,10 @@
               <a:buChar char="•"/>
             </a:pPr>
             <a:r>
-              <a:rPr lang="en-US" sz="1100" dirty="0"/>
+              <a:rPr lang="en-US" sz="1100"/>
               <a:t>Posting to external database</a:t>
             </a:r>
-            <a:endParaRPr lang="en-US" sz="1100" dirty="0">
+            <a:endParaRPr lang="en-US" sz="1100">
               <a:ea typeface="Calibri"/>
               <a:cs typeface="Calibri"/>
             </a:endParaRPr>
@@ -9949,10 +10147,10 @@
               <a:buChar char="•"/>
             </a:pPr>
             <a:r>
-              <a:rPr lang="en-US" sz="1100" dirty="0"/>
+              <a:rPr lang="en-US" sz="1100"/>
               <a:t>Posting to telegram endpoint for bus driver alerts</a:t>
             </a:r>
-            <a:endParaRPr lang="en-US" sz="1100" dirty="0">
+            <a:endParaRPr lang="en-US" sz="1100">
               <a:ea typeface="Calibri"/>
               <a:cs typeface="Calibri"/>
             </a:endParaRPr>
@@ -10026,7 +10224,7 @@
           <a:p>
             <a:pPr algn="ctr"/>
             <a:r>
-              <a:rPr lang="en-US" sz="1400" b="1" dirty="0">
+              <a:rPr lang="en-US" sz="1400" b="1">
                 <a:solidFill>
                   <a:schemeClr val="bg1"/>
                 </a:solidFill>
@@ -10034,7 +10232,7 @@
               <a:t>(Evgenia)</a:t>
             </a:r>
             <a:br>
-              <a:rPr lang="en-US" sz="1400" b="1" dirty="0">
+              <a:rPr lang="en-US" sz="1400" b="1">
                 <a:solidFill>
                   <a:schemeClr val="bg1"/>
                 </a:solidFill>
@@ -10049,7 +10247,7 @@
               <a:t>BackEnd</a:t>
             </a:r>
             <a:r>
-              <a:rPr lang="en-US" sz="1400" b="1" dirty="0">
+              <a:rPr lang="en-US" sz="1400" b="1">
                 <a:solidFill>
                   <a:schemeClr val="bg1"/>
                 </a:solidFill>
@@ -10070,7 +10268,7 @@
               <a:buChar char="•"/>
             </a:pPr>
             <a:r>
-              <a:rPr lang="en-US" sz="1100" dirty="0">
+              <a:rPr lang="en-US" sz="1100">
                 <a:solidFill>
                   <a:srgbClr val="FFFFFF"/>
                 </a:solidFill>
@@ -10078,7 +10276,7 @@
               </a:rPr>
               <a:t>Backend requesting information from context broker according to get requests from the front end. </a:t>
             </a:r>
-            <a:endParaRPr lang="en-US" sz="1100" dirty="0">
+            <a:endParaRPr lang="en-US" sz="1100">
               <a:solidFill>
                 <a:srgbClr val="FFFFFF"/>
               </a:solidFill>
@@ -10092,7 +10290,7 @@
               <a:buChar char="•"/>
             </a:pPr>
             <a:r>
-              <a:rPr lang="en-US" sz="1100" dirty="0">
+              <a:rPr lang="en-US" sz="1100">
                 <a:solidFill>
                   <a:srgbClr val="FFFFFF"/>
                 </a:solidFill>
@@ -10100,7 +10298,7 @@
               </a:rPr>
               <a:t>Notifications to authorities about illegal parking in stations.</a:t>
             </a:r>
-            <a:endParaRPr lang="en-US" sz="1100" dirty="0">
+            <a:endParaRPr lang="en-US" sz="1100">
               <a:cs typeface="Calibri"/>
             </a:endParaRPr>
           </a:p>
@@ -10110,12 +10308,12 @@
               <a:buChar char="•"/>
             </a:pPr>
             <a:r>
-              <a:rPr lang="en-US" sz="1100" dirty="0">
+              <a:rPr lang="en-US" sz="1100">
                 <a:cs typeface="Calibri"/>
               </a:rPr>
               <a:t>Front end making get requests to backend.</a:t>
             </a:r>
-            <a:endParaRPr lang="en-US" dirty="0">
+            <a:endParaRPr lang="en-US">
               <a:cs typeface="Calibri"/>
             </a:endParaRPr>
           </a:p>
@@ -10125,24 +10323,24 @@
               <a:buChar char="•"/>
             </a:pPr>
             <a:r>
-              <a:rPr lang="en-US" sz="1100" dirty="0">
+              <a:rPr lang="en-US" sz="1100">
                 <a:cs typeface="Calibri"/>
               </a:rPr>
               <a:t>Subscription to </a:t>
             </a:r>
             <a:r>
-              <a:rPr lang="en-US" sz="1100" dirty="0" err="1">
+              <a:rPr lang="en-US" sz="1100" err="1">
                 <a:cs typeface="Calibri"/>
               </a:rPr>
               <a:t>mqtt</a:t>
             </a:r>
             <a:r>
-              <a:rPr lang="en-US" sz="1100" dirty="0">
+              <a:rPr lang="en-US" sz="1100">
                 <a:cs typeface="Calibri"/>
               </a:rPr>
               <a:t> entities.</a:t>
             </a:r>
-            <a:endParaRPr lang="en-US" sz="1100" dirty="0">
+            <a:endParaRPr lang="en-US" sz="1100">
               <a:ea typeface="Calibri"/>
               <a:cs typeface="Calibri"/>
             </a:endParaRPr>
@@ -10153,12 +10351,12 @@
               <a:buChar char="•"/>
             </a:pPr>
             <a:r>
-              <a:rPr lang="en-US" sz="1100" dirty="0">
+              <a:rPr lang="en-US" sz="1100">
                 <a:cs typeface="Calibri"/>
               </a:rPr>
               <a:t>Charts and data tables presenting real time data provided by MQTT notifications.</a:t>
             </a:r>
-            <a:endParaRPr lang="en-US" sz="1100" dirty="0">
+            <a:endParaRPr lang="en-US" sz="1100">
               <a:ea typeface="Calibri"/>
               <a:cs typeface="Calibri"/>
             </a:endParaRPr>
@@ -10169,13 +10367,13 @@
               <a:buChar char="•"/>
             </a:pPr>
             <a:r>
-              <a:rPr lang="en-US" sz="1100" dirty="0">
+              <a:rPr lang="en-US" sz="1100">
                 <a:cs typeface="Calibri"/>
               </a:rPr>
               <a:t>Use of Google APIs that </a:t>
             </a:r>
             <a:r>
-              <a:rPr lang="en-US" sz="1100" dirty="0">
+              <a:rPr lang="en-US" sz="1100">
                 <a:solidFill>
                   <a:srgbClr val="FFFFFF"/>
                 </a:solidFill>
@@ -10185,12 +10383,12 @@
               <a:t>facilitates the delivery of </a:t>
             </a:r>
             <a:r>
-              <a:rPr lang="en-US" sz="1100" dirty="0">
+              <a:rPr lang="en-US" sz="1100">
                 <a:cs typeface="Calibri"/>
               </a:rPr>
               <a:t> personalized services to users.</a:t>
             </a:r>
-            <a:endParaRPr lang="en-US" sz="1100" dirty="0">
+            <a:endParaRPr lang="en-US" sz="1100">
               <a:ea typeface="Calibri"/>
               <a:cs typeface="Calibri"/>
             </a:endParaRPr>
@@ -10254,7 +10452,7 @@
           <a:p>
             <a:pPr algn="ctr"/>
             <a:r>
-              <a:rPr lang="en-US" sz="1600" b="1" dirty="0">
+              <a:rPr lang="en-US" sz="1600" b="1">
                 <a:solidFill>
                   <a:schemeClr val="bg1"/>
                 </a:solidFill>
@@ -10272,14 +10470,14 @@
           <a:p>
             <a:pPr algn="ctr"/>
             <a:r>
-              <a:rPr lang="en-US" sz="1600" b="1" dirty="0">
+              <a:rPr lang="en-US" sz="1600" b="1">
                 <a:solidFill>
                   <a:schemeClr val="bg1"/>
                 </a:solidFill>
               </a:rPr>
               <a:t>Bus Station Devices</a:t>
             </a:r>
-            <a:endParaRPr lang="en-US" sz="1600" b="1" dirty="0">
+            <a:endParaRPr lang="en-US" sz="1600" b="1">
               <a:solidFill>
                 <a:schemeClr val="bg1"/>
               </a:solidFill>
@@ -10293,10 +10491,10 @@
               <a:buChar char="•"/>
             </a:pPr>
             <a:r>
-              <a:rPr lang="en-US" sz="1100" dirty="0"/>
+              <a:rPr lang="en-US" sz="1100"/>
               <a:t>Synchronizing bus and bus station data</a:t>
             </a:r>
-            <a:endParaRPr lang="en-US" sz="1100" dirty="0">
+            <a:endParaRPr lang="en-US" sz="1100">
               <a:ea typeface="Calibri"/>
               <a:cs typeface="Calibri"/>
             </a:endParaRPr>
@@ -10307,10 +10505,10 @@
               <a:buChar char="•"/>
             </a:pPr>
             <a:r>
-              <a:rPr lang="en-US" sz="1100" dirty="0"/>
+              <a:rPr lang="en-US" sz="1100"/>
               <a:t>Asynchronous posting of crowd flow in stations every 5 seconds</a:t>
             </a:r>
-            <a:endParaRPr lang="en-US" sz="1100" dirty="0">
+            <a:endParaRPr lang="en-US" sz="1100">
               <a:ea typeface="Calibri"/>
               <a:cs typeface="Calibri"/>
             </a:endParaRPr>
@@ -10321,10 +10519,10 @@
               <a:buChar char="•"/>
             </a:pPr>
             <a:r>
-              <a:rPr lang="en-US" sz="1100" dirty="0"/>
+              <a:rPr lang="en-US" sz="1100"/>
               <a:t>Posting Illegal parking detection</a:t>
             </a:r>
-            <a:endParaRPr lang="en-US" sz="1100" dirty="0">
+            <a:endParaRPr lang="en-US" sz="1100">
               <a:ea typeface="Calibri"/>
               <a:cs typeface="Calibri"/>
             </a:endParaRPr>
@@ -10335,10 +10533,10 @@
               <a:buChar char="•"/>
             </a:pPr>
             <a:r>
-              <a:rPr lang="en-US" sz="1100" dirty="0"/>
+              <a:rPr lang="en-US" sz="1100"/>
               <a:t>Bus Station data update when bus has arrived or illegal parking detected</a:t>
             </a:r>
-            <a:endParaRPr lang="en-US" sz="1100" dirty="0">
+            <a:endParaRPr lang="en-US" sz="1100">
               <a:ea typeface="Calibri"/>
               <a:cs typeface="Calibri"/>
             </a:endParaRPr>
@@ -10349,10 +10547,10 @@
               <a:buChar char="•"/>
             </a:pPr>
             <a:r>
-              <a:rPr lang="en-US" sz="1100" dirty="0"/>
+              <a:rPr lang="en-US" sz="1100"/>
               <a:t>Pausing related fake devices when AI is running. AI implementation detecting crowd flow in station with testing video</a:t>
             </a:r>
-            <a:endParaRPr lang="en-US" sz="1100" dirty="0">
+            <a:endParaRPr lang="en-US" sz="1100">
               <a:ea typeface="Calibri"/>
               <a:cs typeface="Calibri"/>
             </a:endParaRPr>
@@ -10434,7 +10632,7 @@
           <a:p>
             <a:pPr algn="ctr"/>
             <a:r>
-              <a:rPr lang="en-US" sz="1600" b="1" dirty="0">
+              <a:rPr lang="en-US" sz="1600" b="1">
                 <a:cs typeface="Calibri"/>
               </a:rPr>
               <a:t>(Evgenia)</a:t>
@@ -10443,10 +10641,10 @@
           <a:p>
             <a:pPr algn="ctr"/>
             <a:r>
-              <a:rPr lang="en-US" sz="1600" b="1" dirty="0"/>
+              <a:rPr lang="en-US" sz="1600" b="1"/>
               <a:t>Bus Devices</a:t>
             </a:r>
-            <a:endParaRPr lang="en-US" sz="1600" dirty="0"/>
+            <a:endParaRPr lang="en-US" sz="1600"/>
           </a:p>
           <a:p>
             <a:pPr marL="171450" indent="-171450">
@@ -10454,7 +10652,7 @@
               <a:buChar char="•"/>
             </a:pPr>
             <a:r>
-              <a:rPr lang="en-US" sz="1100" dirty="0">
+              <a:rPr lang="en-US" sz="1100">
                 <a:cs typeface="Calibri"/>
               </a:rPr>
               <a:t>First script reading bus location from an Excel document and updating bus location information.</a:t>
@@ -10466,7 +10664,7 @@
               <a:buChar char="•"/>
             </a:pPr>
             <a:r>
-              <a:rPr lang="en-US" sz="1100" dirty="0">
+              <a:rPr lang="en-US" sz="1100">
                 <a:cs typeface="Calibri"/>
               </a:rPr>
               <a:t>First script notifying bus stops that a bus has arrived in a bus station.</a:t>
@@ -10478,7 +10676,7 @@
               <a:buChar char="•"/>
             </a:pPr>
             <a:r>
-              <a:rPr lang="en-US" sz="1100" dirty="0">
+              <a:rPr lang="en-US" sz="1100">
                 <a:cs typeface="Calibri"/>
               </a:rPr>
               <a:t>First script asynchronous posting of crowd flow and bus location information to edge controller.</a:t>
@@ -10490,7 +10688,7 @@
               <a:buChar char="•"/>
             </a:pPr>
             <a:r>
-              <a:rPr lang="en-US" sz="1100" dirty="0">
+              <a:rPr lang="en-US" sz="1100">
                 <a:cs typeface="Calibri"/>
               </a:rPr>
               <a:t>First script using ai for people flow detection from bus doors.</a:t>
@@ -10502,7 +10700,7 @@
               <a:buChar char="•"/>
             </a:pPr>
             <a:r>
-              <a:rPr lang="en-US" sz="1100" dirty="0">
+              <a:rPr lang="en-US" sz="1100">
                 <a:cs typeface="Calibri"/>
               </a:rPr>
               <a:t>First script generating virtual crowd flow data in stations.</a:t>
@@ -10514,7 +10712,7 @@
               <a:buChar char="•"/>
             </a:pPr>
             <a:r>
-              <a:rPr lang="en-US" sz="1100" dirty="0">
+              <a:rPr lang="en-US" sz="1100">
                 <a:cs typeface="Calibri"/>
               </a:rPr>
               <a:t>Use of a second script for running the first providing different entity ids.</a:t>
@@ -10821,23 +11019,6 @@
 </file>
 
 <file path=customXml/item1.xml><?xml version="1.0" encoding="utf-8"?>
-<p:properties xmlns:p="http://schemas.microsoft.com/office/2006/metadata/properties" xmlns:xsi="http://www.w3.org/2001/XMLSchema-instance" xmlns:pc="http://schemas.microsoft.com/office/infopath/2007/PartnerControls">
-  <documentManagement>
-    <_activity xmlns="98929861-1c11-4d8d-8323-a176d27873e4" xsi:nil="true"/>
-  </documentManagement>
-</p:properties>
-</file>
-
-<file path=customXml/item2.xml><?xml version="1.0" encoding="utf-8"?>
-<?mso-contentType ?>
-<FormTemplates xmlns="http://schemas.microsoft.com/sharepoint/v3/contenttype/forms">
-  <Display>DocumentLibraryForm</Display>
-  <Edit>DocumentLibraryForm</Edit>
-  <New>DocumentLibraryForm</New>
-</FormTemplates>
-</file>
-
-<file path=customXml/item3.xml><?xml version="1.0" encoding="utf-8"?>
 <ct:contentTypeSchema xmlns:ct="http://schemas.microsoft.com/office/2006/metadata/contentType" xmlns:ma="http://schemas.microsoft.com/office/2006/metadata/properties/metaAttributes" ct:_="" ma:_="" ma:contentTypeName="Έγγραφο" ma:contentTypeID="0x01010096AEF7E53DA1274FA5836E288EA566D9" ma:contentTypeVersion="4" ma:contentTypeDescription="Δημιουργία νέου εγγράφου" ma:contentTypeScope="" ma:versionID="cf66066b422d00ec32a43cf250991a38">
   <xsd:schema xmlns:xsd="http://www.w3.org/2001/XMLSchema" xmlns:xs="http://www.w3.org/2001/XMLSchema" xmlns:p="http://schemas.microsoft.com/office/2006/metadata/properties" xmlns:ns3="98929861-1c11-4d8d-8323-a176d27873e4" targetNamespace="http://schemas.microsoft.com/office/2006/metadata/properties" ma:root="true" ma:fieldsID="1178424a78998ae98fd0793aee555203" ns3:_="">
     <xsd:import namespace="98929861-1c11-4d8d-8323-a176d27873e4"/>
@@ -10981,31 +11162,24 @@
 </ct:contentTypeSchema>
 </file>
 
-<file path=customXml/itemProps1.xml><?xml version="1.0" encoding="utf-8"?>
-<ds:datastoreItem xmlns:ds="http://schemas.openxmlformats.org/officeDocument/2006/customXml" ds:itemID="{0A918D9D-B157-4B89-9AA1-F61DA90462C2}">
-  <ds:schemaRefs>
-    <ds:schemaRef ds:uri="98929861-1c11-4d8d-8323-a176d27873e4"/>
-    <ds:schemaRef ds:uri="http://purl.org/dc/dcmitype/"/>
-    <ds:schemaRef ds:uri="http://purl.org/dc/elements/1.1/"/>
-    <ds:schemaRef ds:uri="http://purl.org/dc/terms/"/>
-    <ds:schemaRef ds:uri="http://schemas.microsoft.com/office/2006/documentManagement/types"/>
-    <ds:schemaRef ds:uri="http://schemas.microsoft.com/office/2006/metadata/properties"/>
-    <ds:schemaRef ds:uri="http://schemas.microsoft.com/office/infopath/2007/PartnerControls"/>
-    <ds:schemaRef ds:uri="http://schemas.openxmlformats.org/package/2006/metadata/core-properties"/>
-    <ds:schemaRef ds:uri="http://www.w3.org/XML/1998/namespace"/>
-  </ds:schemaRefs>
-</ds:datastoreItem>
+<file path=customXml/item2.xml><?xml version="1.0" encoding="utf-8"?>
+<?mso-contentType ?>
+<FormTemplates xmlns="http://schemas.microsoft.com/sharepoint/v3/contenttype/forms">
+  <Display>DocumentLibraryForm</Display>
+  <Edit>DocumentLibraryForm</Edit>
+  <New>DocumentLibraryForm</New>
+</FormTemplates>
 </file>
 
-<file path=customXml/itemProps2.xml><?xml version="1.0" encoding="utf-8"?>
-<ds:datastoreItem xmlns:ds="http://schemas.openxmlformats.org/officeDocument/2006/customXml" ds:itemID="{6A348AA4-7795-4F89-AF2A-1E7893EDD30E}">
-  <ds:schemaRefs>
-    <ds:schemaRef ds:uri="http://schemas.microsoft.com/sharepoint/v3/contenttype/forms"/>
-  </ds:schemaRefs>
-</ds:datastoreItem>
+<file path=customXml/item3.xml><?xml version="1.0" encoding="utf-8"?>
+<p:properties xmlns:p="http://schemas.microsoft.com/office/2006/metadata/properties" xmlns:xsi="http://www.w3.org/2001/XMLSchema-instance" xmlns:pc="http://schemas.microsoft.com/office/infopath/2007/PartnerControls">
+  <documentManagement>
+    <_activity xmlns="98929861-1c11-4d8d-8323-a176d27873e4" xsi:nil="true"/>
+  </documentManagement>
+</p:properties>
 </file>
 
-<file path=customXml/itemProps3.xml><?xml version="1.0" encoding="utf-8"?>
+<file path=customXml/itemProps1.xml><?xml version="1.0" encoding="utf-8"?>
 <ds:datastoreItem xmlns:ds="http://schemas.openxmlformats.org/officeDocument/2006/customXml" ds:itemID="{A34955E3-893A-45B8-9869-65AE541802B9}">
   <ds:schemaRefs>
     <ds:schemaRef ds:uri="98929861-1c11-4d8d-8323-a176d27873e4"/>
@@ -11021,4 +11195,28 @@
     <ds:schemaRef ds:uri="http://www.w3.org/2001/XMLSchema"/>
   </ds:schemaRefs>
 </ds:datastoreItem>
+</file>
+
+<file path=customXml/itemProps2.xml><?xml version="1.0" encoding="utf-8"?>
+<ds:datastoreItem xmlns:ds="http://schemas.openxmlformats.org/officeDocument/2006/customXml" ds:itemID="{6A348AA4-7795-4F89-AF2A-1E7893EDD30E}">
+  <ds:schemaRefs>
+    <ds:schemaRef ds:uri="http://schemas.microsoft.com/sharepoint/v3/contenttype/forms"/>
+  </ds:schemaRefs>
+</ds:datastoreItem>
+</file>
+
+<file path=customXml/itemProps3.xml><?xml version="1.0" encoding="utf-8"?>
+<ds:datastoreItem xmlns:ds="http://schemas.openxmlformats.org/officeDocument/2006/customXml" ds:itemID="{0A918D9D-B157-4B89-9AA1-F61DA90462C2}">
+  <ds:schemaRefs>
+    <ds:schemaRef ds:uri="98929861-1c11-4d8d-8323-a176d27873e4"/>
+    <ds:schemaRef ds:uri="http://purl.org/dc/dcmitype/"/>
+    <ds:schemaRef ds:uri="http://purl.org/dc/elements/1.1/"/>
+    <ds:schemaRef ds:uri="http://purl.org/dc/terms/"/>
+    <ds:schemaRef ds:uri="http://schemas.microsoft.com/office/2006/documentManagement/types"/>
+    <ds:schemaRef ds:uri="http://schemas.microsoft.com/office/2006/metadata/properties"/>
+    <ds:schemaRef ds:uri="http://schemas.microsoft.com/office/infopath/2007/PartnerControls"/>
+    <ds:schemaRef ds:uri="http://schemas.openxmlformats.org/package/2006/metadata/core-properties"/>
+    <ds:schemaRef ds:uri="http://www.w3.org/XML/1998/namespace"/>
+  </ds:schemaRefs>
+</ds:datastoreItem>
 </file>